--- a/Flipkart Products Analysis.pptx
+++ b/Flipkart Products Analysis.pptx
@@ -5,34 +5,35 @@
     <p:sldMasterId id="2147483655" r:id="rId1"/>
   </p:sldMasterIdLst>
   <p:notesMasterIdLst>
-    <p:notesMasterId r:id="rId15"/>
+    <p:notesMasterId r:id="rId16"/>
   </p:notesMasterIdLst>
   <p:sldIdLst>
     <p:sldId id="256" r:id="rId2"/>
     <p:sldId id="282" r:id="rId3"/>
     <p:sldId id="283" r:id="rId4"/>
-    <p:sldId id="265" r:id="rId5"/>
-    <p:sldId id="274" r:id="rId6"/>
-    <p:sldId id="275" r:id="rId7"/>
-    <p:sldId id="277" r:id="rId8"/>
-    <p:sldId id="276" r:id="rId9"/>
-    <p:sldId id="278" r:id="rId10"/>
-    <p:sldId id="279" r:id="rId11"/>
-    <p:sldId id="280" r:id="rId12"/>
-    <p:sldId id="281" r:id="rId13"/>
-    <p:sldId id="273" r:id="rId14"/>
+    <p:sldId id="284" r:id="rId5"/>
+    <p:sldId id="265" r:id="rId6"/>
+    <p:sldId id="274" r:id="rId7"/>
+    <p:sldId id="275" r:id="rId8"/>
+    <p:sldId id="277" r:id="rId9"/>
+    <p:sldId id="276" r:id="rId10"/>
+    <p:sldId id="278" r:id="rId11"/>
+    <p:sldId id="279" r:id="rId12"/>
+    <p:sldId id="280" r:id="rId13"/>
+    <p:sldId id="281" r:id="rId14"/>
+    <p:sldId id="273" r:id="rId15"/>
   </p:sldIdLst>
   <p:sldSz cx="18288000" cy="10287000"/>
   <p:notesSz cx="6858000" cy="9144000"/>
   <p:embeddedFontLst>
     <p:embeddedFont>
       <p:font typeface="Contrail One" panose="020B0604020202020204" charset="0"/>
-      <p:regular r:id="rId16"/>
+      <p:regular r:id="rId17"/>
     </p:embeddedFont>
     <p:embeddedFont>
       <p:font typeface="Inter" panose="020B0604020202020204" charset="0"/>
-      <p:regular r:id="rId17"/>
-      <p:bold r:id="rId18"/>
+      <p:regular r:id="rId18"/>
+      <p:bold r:id="rId19"/>
     </p:embeddedFont>
   </p:embeddedFontLst>
   <p:defaultTextStyle>
@@ -927,6 +928,115 @@
     </p:spTree>
     <p:extLst>
       <p:ext uri="{BB962C8B-B14F-4D97-AF65-F5344CB8AC3E}">
+        <p14:creationId xmlns:p14="http://schemas.microsoft.com/office/powerpoint/2010/main" val="2844337038"/>
+      </p:ext>
+    </p:extLst>
+  </p:cSld>
+  <p:clrMapOvr>
+    <a:masterClrMapping/>
+  </p:clrMapOvr>
+</p:notes>
+</file>
+
+<file path=ppt/notesSlides/notesSlide11.xml><?xml version="1.0" encoding="utf-8"?>
+<p:notes xmlns:a="http://schemas.openxmlformats.org/drawingml/2006/main" xmlns:r="http://schemas.openxmlformats.org/officeDocument/2006/relationships" xmlns:p="http://schemas.openxmlformats.org/presentationml/2006/main" showMasterSp="0" showMasterPhAnim="0">
+  <p:cSld>
+    <p:spTree>
+      <p:nvGrpSpPr>
+        <p:cNvPr id="1" name="Shape 481"/>
+        <p:cNvGrpSpPr/>
+        <p:nvPr/>
+      </p:nvGrpSpPr>
+      <p:grpSpPr>
+        <a:xfrm>
+          <a:off x="0" y="0"/>
+          <a:ext cx="0" cy="0"/>
+          <a:chOff x="0" y="0"/>
+          <a:chExt cx="0" cy="0"/>
+        </a:xfrm>
+      </p:grpSpPr>
+      <p:sp>
+        <p:nvSpPr>
+          <p:cNvPr id="482" name="Google Shape;482;p10:notes"/>
+          <p:cNvSpPr txBox="1">
+            <a:spLocks noGrp="1"/>
+          </p:cNvSpPr>
+          <p:nvPr>
+            <p:ph type="body" idx="1"/>
+          </p:nvPr>
+        </p:nvSpPr>
+        <p:spPr>
+          <a:xfrm>
+            <a:off x="685800" y="4343400"/>
+            <a:ext cx="5486400" cy="4114800"/>
+          </a:xfrm>
+          <a:prstGeom prst="rect">
+            <a:avLst/>
+          </a:prstGeom>
+        </p:spPr>
+        <p:txBody>
+          <a:bodyPr spcFirstLastPara="1" wrap="square" lIns="91425" tIns="91425" rIns="91425" bIns="91425" anchor="t" anchorCtr="0">
+            <a:noAutofit/>
+          </a:bodyPr>
+          <a:lstStyle/>
+          <a:p>
+            <a:pPr marL="0" lvl="0" indent="0" algn="l" rtl="0">
+              <a:spcBef>
+                <a:spcPts val="0"/>
+              </a:spcBef>
+              <a:spcAft>
+                <a:spcPts val="0"/>
+              </a:spcAft>
+              <a:buNone/>
+            </a:pPr>
+            <a:endParaRPr/>
+          </a:p>
+        </p:txBody>
+      </p:sp>
+      <p:sp>
+        <p:nvSpPr>
+          <p:cNvPr id="483" name="Google Shape;483;p10:notes"/>
+          <p:cNvSpPr>
+            <a:spLocks noGrp="1" noRot="1" noChangeAspect="1"/>
+          </p:cNvSpPr>
+          <p:nvPr>
+            <p:ph type="sldImg" idx="2"/>
+          </p:nvPr>
+        </p:nvSpPr>
+        <p:spPr>
+          <a:xfrm>
+            <a:off x="381000" y="685800"/>
+            <a:ext cx="6096000" cy="3429000"/>
+          </a:xfrm>
+          <a:custGeom>
+            <a:avLst/>
+            <a:gdLst/>
+            <a:ahLst/>
+            <a:cxnLst/>
+            <a:rect l="l" t="t" r="r" b="b"/>
+            <a:pathLst>
+              <a:path w="120000" h="120000" extrusionOk="0">
+                <a:moveTo>
+                  <a:pt x="0" y="0"/>
+                </a:moveTo>
+                <a:lnTo>
+                  <a:pt x="120000" y="0"/>
+                </a:lnTo>
+                <a:lnTo>
+                  <a:pt x="120000" y="120000"/>
+                </a:lnTo>
+                <a:lnTo>
+                  <a:pt x="0" y="120000"/>
+                </a:lnTo>
+                <a:close/>
+              </a:path>
+            </a:pathLst>
+          </a:custGeom>
+        </p:spPr>
+      </p:sp>
+    </p:spTree>
+    <p:extLst>
+      <p:ext uri="{BB962C8B-B14F-4D97-AF65-F5344CB8AC3E}">
         <p14:creationId xmlns:p14="http://schemas.microsoft.com/office/powerpoint/2010/main" val="3308319104"/>
       </p:ext>
     </p:extLst>
@@ -937,7 +1047,7 @@
 </p:notes>
 </file>
 
-<file path=ppt/notesSlides/notesSlide11.xml><?xml version="1.0" encoding="utf-8"?>
+<file path=ppt/notesSlides/notesSlide12.xml><?xml version="1.0" encoding="utf-8"?>
 <p:notes xmlns:a="http://schemas.openxmlformats.org/drawingml/2006/main" xmlns:r="http://schemas.openxmlformats.org/officeDocument/2006/relationships" xmlns:p="http://schemas.openxmlformats.org/presentationml/2006/main" showMasterSp="0" showMasterPhAnim="0">
   <p:cSld>
     <p:spTree>
@@ -1046,7 +1156,7 @@
 </p:notes>
 </file>
 
-<file path=ppt/notesSlides/notesSlide12.xml><?xml version="1.0" encoding="utf-8"?>
+<file path=ppt/notesSlides/notesSlide13.xml><?xml version="1.0" encoding="utf-8"?>
 <p:notes xmlns:a="http://schemas.openxmlformats.org/drawingml/2006/main" xmlns:r="http://schemas.openxmlformats.org/officeDocument/2006/relationships" xmlns:p="http://schemas.openxmlformats.org/presentationml/2006/main" showMasterSp="0" showMasterPhAnim="0">
   <p:cSld>
     <p:spTree>
@@ -1155,7 +1265,7 @@
 </p:notes>
 </file>
 
-<file path=ppt/notesSlides/notesSlide13.xml><?xml version="1.0" encoding="utf-8"?>
+<file path=ppt/notesSlides/notesSlide14.xml><?xml version="1.0" encoding="utf-8"?>
 <p:notes xmlns:a="http://schemas.openxmlformats.org/drawingml/2006/main" xmlns:r="http://schemas.openxmlformats.org/officeDocument/2006/relationships" xmlns:p="http://schemas.openxmlformats.org/presentationml/2006/main" showMasterSp="0" showMasterPhAnim="0">
   <p:cSld>
     <p:spTree>
@@ -1482,6 +1592,133 @@
   <p:cSld>
     <p:spTree>
       <p:nvGrpSpPr>
+        <p:cNvPr id="1" name="Shape 481">
+          <a:extLst>
+            <a:ext uri="{FF2B5EF4-FFF2-40B4-BE49-F238E27FC236}">
+              <a16:creationId xmlns:a16="http://schemas.microsoft.com/office/drawing/2014/main" id="{CCA3E6DD-92B0-56E3-8D59-551A616A3BE4}"/>
+            </a:ext>
+          </a:extLst>
+        </p:cNvPr>
+        <p:cNvGrpSpPr/>
+        <p:nvPr/>
+      </p:nvGrpSpPr>
+      <p:grpSpPr>
+        <a:xfrm>
+          <a:off x="0" y="0"/>
+          <a:ext cx="0" cy="0"/>
+          <a:chOff x="0" y="0"/>
+          <a:chExt cx="0" cy="0"/>
+        </a:xfrm>
+      </p:grpSpPr>
+      <p:sp>
+        <p:nvSpPr>
+          <p:cNvPr id="482" name="Google Shape;482;p10:notes">
+            <a:extLst>
+              <a:ext uri="{FF2B5EF4-FFF2-40B4-BE49-F238E27FC236}">
+                <a16:creationId xmlns:a16="http://schemas.microsoft.com/office/drawing/2014/main" id="{08F81F34-1A3F-CC79-E931-1975B1922FD1}"/>
+              </a:ext>
+            </a:extLst>
+          </p:cNvPr>
+          <p:cNvSpPr txBox="1">
+            <a:spLocks noGrp="1"/>
+          </p:cNvSpPr>
+          <p:nvPr>
+            <p:ph type="body" idx="1"/>
+          </p:nvPr>
+        </p:nvSpPr>
+        <p:spPr>
+          <a:xfrm>
+            <a:off x="685800" y="4343400"/>
+            <a:ext cx="5486400" cy="4114800"/>
+          </a:xfrm>
+          <a:prstGeom prst="rect">
+            <a:avLst/>
+          </a:prstGeom>
+        </p:spPr>
+        <p:txBody>
+          <a:bodyPr spcFirstLastPara="1" wrap="square" lIns="91425" tIns="91425" rIns="91425" bIns="91425" anchor="t" anchorCtr="0">
+            <a:noAutofit/>
+          </a:bodyPr>
+          <a:lstStyle/>
+          <a:p>
+            <a:pPr marL="0" lvl="0" indent="0" algn="l" rtl="0">
+              <a:spcBef>
+                <a:spcPts val="0"/>
+              </a:spcBef>
+              <a:spcAft>
+                <a:spcPts val="0"/>
+              </a:spcAft>
+              <a:buNone/>
+            </a:pPr>
+            <a:endParaRPr/>
+          </a:p>
+        </p:txBody>
+      </p:sp>
+      <p:sp>
+        <p:nvSpPr>
+          <p:cNvPr id="483" name="Google Shape;483;p10:notes">
+            <a:extLst>
+              <a:ext uri="{FF2B5EF4-FFF2-40B4-BE49-F238E27FC236}">
+                <a16:creationId xmlns:a16="http://schemas.microsoft.com/office/drawing/2014/main" id="{54D693BD-8C8D-CFBC-A773-76ECEC06AA15}"/>
+              </a:ext>
+            </a:extLst>
+          </p:cNvPr>
+          <p:cNvSpPr>
+            <a:spLocks noGrp="1" noRot="1" noChangeAspect="1"/>
+          </p:cNvSpPr>
+          <p:nvPr>
+            <p:ph type="sldImg" idx="2"/>
+          </p:nvPr>
+        </p:nvSpPr>
+        <p:spPr>
+          <a:xfrm>
+            <a:off x="381000" y="685800"/>
+            <a:ext cx="6096000" cy="3429000"/>
+          </a:xfrm>
+          <a:custGeom>
+            <a:avLst/>
+            <a:gdLst/>
+            <a:ahLst/>
+            <a:cxnLst/>
+            <a:rect l="l" t="t" r="r" b="b"/>
+            <a:pathLst>
+              <a:path w="120000" h="120000" extrusionOk="0">
+                <a:moveTo>
+                  <a:pt x="0" y="0"/>
+                </a:moveTo>
+                <a:lnTo>
+                  <a:pt x="120000" y="0"/>
+                </a:lnTo>
+                <a:lnTo>
+                  <a:pt x="120000" y="120000"/>
+                </a:lnTo>
+                <a:lnTo>
+                  <a:pt x="0" y="120000"/>
+                </a:lnTo>
+                <a:close/>
+              </a:path>
+            </a:pathLst>
+          </a:custGeom>
+        </p:spPr>
+      </p:sp>
+    </p:spTree>
+    <p:extLst>
+      <p:ext uri="{BB962C8B-B14F-4D97-AF65-F5344CB8AC3E}">
+        <p14:creationId xmlns:p14="http://schemas.microsoft.com/office/powerpoint/2010/main" val="232172611"/>
+      </p:ext>
+    </p:extLst>
+  </p:cSld>
+  <p:clrMapOvr>
+    <a:masterClrMapping/>
+  </p:clrMapOvr>
+</p:notes>
+</file>
+
+<file path=ppt/notesSlides/notesSlide5.xml><?xml version="1.0" encoding="utf-8"?>
+<p:notes xmlns:a="http://schemas.openxmlformats.org/drawingml/2006/main" xmlns:r="http://schemas.openxmlformats.org/officeDocument/2006/relationships" xmlns:p="http://schemas.openxmlformats.org/presentationml/2006/main" showMasterSp="0" showMasterPhAnim="0">
+  <p:cSld>
+    <p:spTree>
+      <p:nvGrpSpPr>
         <p:cNvPr id="1" name="Shape 481"/>
         <p:cNvGrpSpPr/>
         <p:nvPr/>
@@ -1581,7 +1818,7 @@
 </p:notes>
 </file>
 
-<file path=ppt/notesSlides/notesSlide5.xml><?xml version="1.0" encoding="utf-8"?>
+<file path=ppt/notesSlides/notesSlide6.xml><?xml version="1.0" encoding="utf-8"?>
 <p:notes xmlns:a="http://schemas.openxmlformats.org/drawingml/2006/main" xmlns:r="http://schemas.openxmlformats.org/officeDocument/2006/relationships" xmlns:p="http://schemas.openxmlformats.org/presentationml/2006/main" showMasterSp="0" showMasterPhAnim="0">
   <p:cSld>
     <p:spTree>
@@ -1690,7 +1927,7 @@
 </p:notes>
 </file>
 
-<file path=ppt/notesSlides/notesSlide6.xml><?xml version="1.0" encoding="utf-8"?>
+<file path=ppt/notesSlides/notesSlide7.xml><?xml version="1.0" encoding="utf-8"?>
 <p:notes xmlns:a="http://schemas.openxmlformats.org/drawingml/2006/main" xmlns:r="http://schemas.openxmlformats.org/officeDocument/2006/relationships" xmlns:p="http://schemas.openxmlformats.org/presentationml/2006/main" showMasterSp="0" showMasterPhAnim="0">
   <p:cSld>
     <p:spTree>
@@ -1799,7 +2036,7 @@
 </p:notes>
 </file>
 
-<file path=ppt/notesSlides/notesSlide7.xml><?xml version="1.0" encoding="utf-8"?>
+<file path=ppt/notesSlides/notesSlide8.xml><?xml version="1.0" encoding="utf-8"?>
 <p:notes xmlns:a="http://schemas.openxmlformats.org/drawingml/2006/main" xmlns:r="http://schemas.openxmlformats.org/officeDocument/2006/relationships" xmlns:p="http://schemas.openxmlformats.org/presentationml/2006/main" showMasterSp="0" showMasterPhAnim="0">
   <p:cSld>
     <p:spTree>
@@ -1908,7 +2145,7 @@
 </p:notes>
 </file>
 
-<file path=ppt/notesSlides/notesSlide8.xml><?xml version="1.0" encoding="utf-8"?>
+<file path=ppt/notesSlides/notesSlide9.xml><?xml version="1.0" encoding="utf-8"?>
 <p:notes xmlns:a="http://schemas.openxmlformats.org/drawingml/2006/main" xmlns:r="http://schemas.openxmlformats.org/officeDocument/2006/relationships" xmlns:p="http://schemas.openxmlformats.org/presentationml/2006/main" showMasterSp="0" showMasterPhAnim="0">
   <p:cSld>
     <p:spTree>
@@ -2008,115 +2245,6 @@
     <p:extLst>
       <p:ext uri="{BB962C8B-B14F-4D97-AF65-F5344CB8AC3E}">
         <p14:creationId xmlns:p14="http://schemas.microsoft.com/office/powerpoint/2010/main" val="2710569997"/>
-      </p:ext>
-    </p:extLst>
-  </p:cSld>
-  <p:clrMapOvr>
-    <a:masterClrMapping/>
-  </p:clrMapOvr>
-</p:notes>
-</file>
-
-<file path=ppt/notesSlides/notesSlide9.xml><?xml version="1.0" encoding="utf-8"?>
-<p:notes xmlns:a="http://schemas.openxmlformats.org/drawingml/2006/main" xmlns:r="http://schemas.openxmlformats.org/officeDocument/2006/relationships" xmlns:p="http://schemas.openxmlformats.org/presentationml/2006/main" showMasterSp="0" showMasterPhAnim="0">
-  <p:cSld>
-    <p:spTree>
-      <p:nvGrpSpPr>
-        <p:cNvPr id="1" name="Shape 481"/>
-        <p:cNvGrpSpPr/>
-        <p:nvPr/>
-      </p:nvGrpSpPr>
-      <p:grpSpPr>
-        <a:xfrm>
-          <a:off x="0" y="0"/>
-          <a:ext cx="0" cy="0"/>
-          <a:chOff x="0" y="0"/>
-          <a:chExt cx="0" cy="0"/>
-        </a:xfrm>
-      </p:grpSpPr>
-      <p:sp>
-        <p:nvSpPr>
-          <p:cNvPr id="482" name="Google Shape;482;p10:notes"/>
-          <p:cNvSpPr txBox="1">
-            <a:spLocks noGrp="1"/>
-          </p:cNvSpPr>
-          <p:nvPr>
-            <p:ph type="body" idx="1"/>
-          </p:nvPr>
-        </p:nvSpPr>
-        <p:spPr>
-          <a:xfrm>
-            <a:off x="685800" y="4343400"/>
-            <a:ext cx="5486400" cy="4114800"/>
-          </a:xfrm>
-          <a:prstGeom prst="rect">
-            <a:avLst/>
-          </a:prstGeom>
-        </p:spPr>
-        <p:txBody>
-          <a:bodyPr spcFirstLastPara="1" wrap="square" lIns="91425" tIns="91425" rIns="91425" bIns="91425" anchor="t" anchorCtr="0">
-            <a:noAutofit/>
-          </a:bodyPr>
-          <a:lstStyle/>
-          <a:p>
-            <a:pPr marL="0" lvl="0" indent="0" algn="l" rtl="0">
-              <a:spcBef>
-                <a:spcPts val="0"/>
-              </a:spcBef>
-              <a:spcAft>
-                <a:spcPts val="0"/>
-              </a:spcAft>
-              <a:buNone/>
-            </a:pPr>
-            <a:endParaRPr/>
-          </a:p>
-        </p:txBody>
-      </p:sp>
-      <p:sp>
-        <p:nvSpPr>
-          <p:cNvPr id="483" name="Google Shape;483;p10:notes"/>
-          <p:cNvSpPr>
-            <a:spLocks noGrp="1" noRot="1" noChangeAspect="1"/>
-          </p:cNvSpPr>
-          <p:nvPr>
-            <p:ph type="sldImg" idx="2"/>
-          </p:nvPr>
-        </p:nvSpPr>
-        <p:spPr>
-          <a:xfrm>
-            <a:off x="381000" y="685800"/>
-            <a:ext cx="6096000" cy="3429000"/>
-          </a:xfrm>
-          <a:custGeom>
-            <a:avLst/>
-            <a:gdLst/>
-            <a:ahLst/>
-            <a:cxnLst/>
-            <a:rect l="l" t="t" r="r" b="b"/>
-            <a:pathLst>
-              <a:path w="120000" h="120000" extrusionOk="0">
-                <a:moveTo>
-                  <a:pt x="0" y="0"/>
-                </a:moveTo>
-                <a:lnTo>
-                  <a:pt x="120000" y="0"/>
-                </a:lnTo>
-                <a:lnTo>
-                  <a:pt x="120000" y="120000"/>
-                </a:lnTo>
-                <a:lnTo>
-                  <a:pt x="0" y="120000"/>
-                </a:lnTo>
-                <a:close/>
-              </a:path>
-            </a:pathLst>
-          </a:custGeom>
-        </p:spPr>
-      </p:sp>
-    </p:spTree>
-    <p:extLst>
-      <p:ext uri="{BB962C8B-B14F-4D97-AF65-F5344CB8AC3E}">
-        <p14:creationId xmlns:p14="http://schemas.microsoft.com/office/powerpoint/2010/main" val="2844337038"/>
       </p:ext>
     </p:extLst>
   </p:cSld>
@@ -15321,6 +15449,190 @@
               <a:buNone/>
             </a:pPr>
             <a:r>
+              <a:rPr lang="en-US" sz="3200" b="0" i="0" u="none" strike="noStrike" cap="none">
+                <a:solidFill>
+                  <a:srgbClr val="FFFFFF"/>
+                </a:solidFill>
+                <a:latin typeface="Inter"/>
+                <a:ea typeface="Inter"/>
+                <a:cs typeface="Inter"/>
+                <a:sym typeface="Inter"/>
+              </a:rPr>
+              <a:t>6) List down the top 10 </a:t>
+            </a:r>
+            <a:r>
+              <a:rPr lang="en-US" sz="3200">
+                <a:solidFill>
+                  <a:srgbClr val="FFFFFF"/>
+                </a:solidFill>
+                <a:latin typeface="Inter"/>
+                <a:ea typeface="Inter"/>
+                <a:cs typeface="Inter"/>
+                <a:sym typeface="Inter"/>
+              </a:rPr>
+              <a:t>categories</a:t>
+            </a:r>
+            <a:r>
+              <a:rPr lang="en-US" sz="3200" b="0" i="0" u="none" strike="noStrike" cap="none">
+                <a:solidFill>
+                  <a:srgbClr val="FFFFFF"/>
+                </a:solidFill>
+                <a:latin typeface="Inter"/>
+                <a:ea typeface="Inter"/>
+                <a:cs typeface="Inter"/>
+                <a:sym typeface="Inter"/>
+              </a:rPr>
+              <a:t> with the highest </a:t>
+            </a:r>
+            <a:r>
+              <a:rPr lang="en-US" sz="3200">
+                <a:solidFill>
+                  <a:srgbClr val="FFFFFF"/>
+                </a:solidFill>
+                <a:latin typeface="Inter"/>
+                <a:ea typeface="Inter"/>
+                <a:cs typeface="Inter"/>
+                <a:sym typeface="Inter"/>
+              </a:rPr>
+              <a:t>sales having discount greater than 60%.</a:t>
+            </a:r>
+            <a:endParaRPr sz="3200"/>
+          </a:p>
+        </p:txBody>
+      </p:sp>
+      <p:pic>
+        <p:nvPicPr>
+          <p:cNvPr id="3" name="Picture 2">
+            <a:extLst>
+              <a:ext uri="{FF2B5EF4-FFF2-40B4-BE49-F238E27FC236}">
+                <a16:creationId xmlns:a16="http://schemas.microsoft.com/office/drawing/2014/main" id="{2ED28A99-D6DA-5B22-BA8F-BB323DDBB686}"/>
+              </a:ext>
+            </a:extLst>
+          </p:cNvPr>
+          <p:cNvPicPr>
+            <a:picLocks noChangeAspect="1"/>
+          </p:cNvPicPr>
+          <p:nvPr/>
+        </p:nvPicPr>
+        <p:blipFill>
+          <a:blip r:embed="rId3"/>
+          <a:srcRect/>
+          <a:stretch/>
+        </p:blipFill>
+        <p:spPr>
+          <a:xfrm>
+            <a:off x="4013823" y="2418735"/>
+            <a:ext cx="10260347" cy="6724800"/>
+          </a:xfrm>
+          <a:prstGeom prst="rect">
+            <a:avLst/>
+          </a:prstGeom>
+          <a:ln w="127000" cap="rnd">
+            <a:solidFill>
+              <a:srgbClr val="FFFFFF"/>
+            </a:solidFill>
+          </a:ln>
+          <a:effectLst>
+            <a:outerShdw blurRad="76200" dist="95250" dir="10500000" sx="97000" sy="23000" kx="900000" algn="br" rotWithShape="0">
+              <a:srgbClr val="000000">
+                <a:alpha val="20000"/>
+              </a:srgbClr>
+            </a:outerShdw>
+          </a:effectLst>
+          <a:scene3d>
+            <a:camera prst="orthographicFront"/>
+            <a:lightRig rig="twoPt" dir="t">
+              <a:rot lat="0" lon="0" rev="7800000"/>
+            </a:lightRig>
+          </a:scene3d>
+          <a:sp3d contourW="6350">
+            <a:bevelT w="50800" h="16510"/>
+            <a:contourClr>
+              <a:srgbClr val="C0C0C0"/>
+            </a:contourClr>
+          </a:sp3d>
+        </p:spPr>
+      </p:pic>
+    </p:spTree>
+    <p:extLst>
+      <p:ext uri="{BB962C8B-B14F-4D97-AF65-F5344CB8AC3E}">
+        <p14:creationId xmlns:p14="http://schemas.microsoft.com/office/powerpoint/2010/main" val="2249419983"/>
+      </p:ext>
+    </p:extLst>
+  </p:cSld>
+  <p:clrMapOvr>
+    <a:masterClrMapping/>
+  </p:clrMapOvr>
+  <mc:AlternateContent xmlns:mc="http://schemas.openxmlformats.org/markup-compatibility/2006" xmlns:p14="http://schemas.microsoft.com/office/powerpoint/2010/main">
+    <mc:Choice Requires="p14">
+      <p:transition spd="slow" p14:dur="1250">
+        <p:wipe/>
+      </p:transition>
+    </mc:Choice>
+    <mc:Fallback xmlns="">
+      <p:transition spd="slow">
+        <p:wipe/>
+      </p:transition>
+    </mc:Fallback>
+  </mc:AlternateContent>
+</p:sld>
+</file>
+
+<file path=ppt/slides/slide11.xml><?xml version="1.0" encoding="utf-8"?>
+<p:sld xmlns:a="http://schemas.openxmlformats.org/drawingml/2006/main" xmlns:r="http://schemas.openxmlformats.org/officeDocument/2006/relationships" xmlns:p="http://schemas.openxmlformats.org/presentationml/2006/main">
+  <p:cSld>
+    <p:spTree>
+      <p:nvGrpSpPr>
+        <p:cNvPr id="1" name="Shape 484"/>
+        <p:cNvGrpSpPr/>
+        <p:nvPr/>
+      </p:nvGrpSpPr>
+      <p:grpSpPr>
+        <a:xfrm>
+          <a:off x="0" y="0"/>
+          <a:ext cx="0" cy="0"/>
+          <a:chOff x="0" y="0"/>
+          <a:chExt cx="0" cy="0"/>
+        </a:xfrm>
+      </p:grpSpPr>
+      <p:sp>
+        <p:nvSpPr>
+          <p:cNvPr id="522" name="Google Shape;522;p18"/>
+          <p:cNvSpPr txBox="1"/>
+          <p:nvPr/>
+        </p:nvSpPr>
+        <p:spPr>
+          <a:xfrm>
+            <a:off x="1028698" y="544227"/>
+            <a:ext cx="16230599" cy="1477328"/>
+          </a:xfrm>
+          <a:prstGeom prst="rect">
+            <a:avLst/>
+          </a:prstGeom>
+          <a:noFill/>
+          <a:ln>
+            <a:noFill/>
+          </a:ln>
+        </p:spPr>
+        <p:txBody>
+          <a:bodyPr spcFirstLastPara="1" wrap="square" lIns="0" tIns="0" rIns="0" bIns="0" anchor="t" anchorCtr="0">
+            <a:spAutoFit/>
+          </a:bodyPr>
+          <a:lstStyle/>
+          <a:p>
+            <a:pPr marL="0" marR="0" lvl="0" indent="0" rtl="0">
+              <a:lnSpc>
+                <a:spcPct val="150000"/>
+              </a:lnSpc>
+              <a:spcBef>
+                <a:spcPts val="0"/>
+              </a:spcBef>
+              <a:spcAft>
+                <a:spcPts val="0"/>
+              </a:spcAft>
+              <a:buNone/>
+            </a:pPr>
+            <a:r>
               <a:rPr lang="en-US" sz="3200">
                 <a:solidFill>
                   <a:srgbClr val="FFFFFF"/>
@@ -15381,8 +15693,8 @@
         </p:blipFill>
         <p:spPr>
           <a:xfrm>
-            <a:off x="4224523" y="2489688"/>
-            <a:ext cx="9838947" cy="6610067"/>
+            <a:off x="4224526" y="2614807"/>
+            <a:ext cx="9838947" cy="6632432"/>
           </a:xfrm>
           <a:prstGeom prst="rect">
             <a:avLst/>
@@ -15438,7 +15750,7 @@
 </p:sld>
 </file>
 
-<file path=ppt/slides/slide11.xml><?xml version="1.0" encoding="utf-8"?>
+<file path=ppt/slides/slide12.xml><?xml version="1.0" encoding="utf-8"?>
 <p:sld xmlns:a="http://schemas.openxmlformats.org/drawingml/2006/main" xmlns:r="http://schemas.openxmlformats.org/officeDocument/2006/relationships" xmlns:p="http://schemas.openxmlformats.org/presentationml/2006/main">
   <p:cSld>
     <p:spTree>
@@ -15565,7 +15877,7 @@
         </p:blipFill>
         <p:spPr>
           <a:xfrm>
-            <a:off x="4741603" y="2474940"/>
+            <a:off x="4741603" y="2533933"/>
             <a:ext cx="8804787" cy="6610067"/>
           </a:xfrm>
           <a:prstGeom prst="rect">
@@ -15622,7 +15934,7 @@
 </p:sld>
 </file>
 
-<file path=ppt/slides/slide12.xml><?xml version="1.0" encoding="utf-8"?>
+<file path=ppt/slides/slide13.xml><?xml version="1.0" encoding="utf-8"?>
 <p:sld xmlns:a="http://schemas.openxmlformats.org/drawingml/2006/main" xmlns:r="http://schemas.openxmlformats.org/officeDocument/2006/relationships" xmlns:p="http://schemas.openxmlformats.org/presentationml/2006/main">
   <p:cSld>
     <p:spTree>
@@ -15728,8 +16040,8 @@
         </p:blipFill>
         <p:spPr>
           <a:xfrm>
-            <a:off x="1079277" y="2066432"/>
-            <a:ext cx="12961187" cy="7068536"/>
+            <a:off x="1028700" y="2213917"/>
+            <a:ext cx="13100255" cy="7068536"/>
           </a:xfrm>
           <a:prstGeom prst="rect">
             <a:avLst/>
@@ -15761,7 +16073,7 @@
 </p:sld>
 </file>
 
-<file path=ppt/slides/slide13.xml><?xml version="1.0" encoding="utf-8"?>
+<file path=ppt/slides/slide14.xml><?xml version="1.0" encoding="utf-8"?>
 <p:sld xmlns:a="http://schemas.openxmlformats.org/drawingml/2006/main" xmlns:r="http://schemas.openxmlformats.org/officeDocument/2006/relationships" xmlns:p="http://schemas.openxmlformats.org/presentationml/2006/main">
   <p:cSld>
     <p:spTree>
@@ -16266,7 +16578,7 @@
                 <a:cs typeface="Contrail One"/>
                 <a:sym typeface="Contrail One"/>
               </a:rPr>
-              <a:t>Data Model and Technology Used</a:t>
+              <a:t>Data Architecture</a:t>
             </a:r>
             <a:endParaRPr/>
           </a:p>
@@ -16274,10 +16586,10 @@
       </p:sp>
       <p:pic>
         <p:nvPicPr>
-          <p:cNvPr id="4" name="Picture 3">
+          <p:cNvPr id="3" name="Picture 2">
             <a:extLst>
               <a:ext uri="{FF2B5EF4-FFF2-40B4-BE49-F238E27FC236}">
-                <a16:creationId xmlns:a16="http://schemas.microsoft.com/office/drawing/2014/main" id="{57331592-FE5C-481A-13E3-4FD128FCAF51}"/>
+                <a16:creationId xmlns:a16="http://schemas.microsoft.com/office/drawing/2014/main" id="{3E25A1DD-8211-65E7-0FC3-52104619B2E1}"/>
               </a:ext>
             </a:extLst>
           </p:cNvPr>
@@ -16294,7 +16606,144 @@
         </p:blipFill>
         <p:spPr>
           <a:xfrm>
-            <a:off x="1028700" y="2434461"/>
+            <a:off x="1028700" y="2284538"/>
+            <a:ext cx="12978969" cy="6962702"/>
+          </a:xfrm>
+          <a:prstGeom prst="rect">
+            <a:avLst/>
+          </a:prstGeom>
+        </p:spPr>
+      </p:pic>
+    </p:spTree>
+    <p:extLst>
+      <p:ext uri="{BB962C8B-B14F-4D97-AF65-F5344CB8AC3E}">
+        <p14:creationId xmlns:p14="http://schemas.microsoft.com/office/powerpoint/2010/main" val="2093057309"/>
+      </p:ext>
+    </p:extLst>
+  </p:cSld>
+  <p:clrMapOvr>
+    <a:masterClrMapping/>
+  </p:clrMapOvr>
+  <mc:AlternateContent xmlns:mc="http://schemas.openxmlformats.org/markup-compatibility/2006" xmlns:p14="http://schemas.microsoft.com/office/powerpoint/2010/main">
+    <mc:Choice Requires="p14">
+      <p:transition spd="slow" p14:dur="1250">
+        <p:wipe/>
+      </p:transition>
+    </mc:Choice>
+    <mc:Fallback xmlns="">
+      <p:transition spd="slow">
+        <p:wipe/>
+      </p:transition>
+    </mc:Fallback>
+  </mc:AlternateContent>
+</p:sld>
+</file>
+
+<file path=ppt/slides/slide4.xml><?xml version="1.0" encoding="utf-8"?>
+<p:sld xmlns:a="http://schemas.openxmlformats.org/drawingml/2006/main" xmlns:r="http://schemas.openxmlformats.org/officeDocument/2006/relationships" xmlns:p="http://schemas.openxmlformats.org/presentationml/2006/main">
+  <p:cSld>
+    <p:spTree>
+      <p:nvGrpSpPr>
+        <p:cNvPr id="1" name="Shape 484">
+          <a:extLst>
+            <a:ext uri="{FF2B5EF4-FFF2-40B4-BE49-F238E27FC236}">
+              <a16:creationId xmlns:a16="http://schemas.microsoft.com/office/drawing/2014/main" id="{EC8F88A8-31EA-E8E2-1E5C-ADB1ABE0B3B8}"/>
+            </a:ext>
+          </a:extLst>
+        </p:cNvPr>
+        <p:cNvGrpSpPr/>
+        <p:nvPr/>
+      </p:nvGrpSpPr>
+      <p:grpSpPr>
+        <a:xfrm>
+          <a:off x="0" y="0"/>
+          <a:ext cx="0" cy="0"/>
+          <a:chOff x="0" y="0"/>
+          <a:chExt cx="0" cy="0"/>
+        </a:xfrm>
+      </p:grpSpPr>
+      <p:sp>
+        <p:nvSpPr>
+          <p:cNvPr id="512" name="Google Shape;512;p18">
+            <a:extLst>
+              <a:ext uri="{FF2B5EF4-FFF2-40B4-BE49-F238E27FC236}">
+                <a16:creationId xmlns:a16="http://schemas.microsoft.com/office/drawing/2014/main" id="{2D5D6660-8EB7-01F1-27E8-1D4B291F8772}"/>
+              </a:ext>
+            </a:extLst>
+          </p:cNvPr>
+          <p:cNvSpPr txBox="1"/>
+          <p:nvPr/>
+        </p:nvSpPr>
+        <p:spPr>
+          <a:xfrm>
+            <a:off x="1028700" y="152147"/>
+            <a:ext cx="16230600" cy="1925912"/>
+          </a:xfrm>
+          <a:prstGeom prst="rect">
+            <a:avLst/>
+          </a:prstGeom>
+          <a:noFill/>
+          <a:ln>
+            <a:noFill/>
+          </a:ln>
+        </p:spPr>
+        <p:txBody>
+          <a:bodyPr spcFirstLastPara="1" wrap="square" lIns="0" tIns="0" rIns="0" bIns="0" anchor="t" anchorCtr="0">
+            <a:spAutoFit/>
+          </a:bodyPr>
+          <a:lstStyle/>
+          <a:p>
+            <a:pPr marL="0" marR="0" lvl="0" indent="0" rtl="0">
+              <a:lnSpc>
+                <a:spcPct val="140004"/>
+              </a:lnSpc>
+              <a:spcBef>
+                <a:spcPts val="0"/>
+              </a:spcBef>
+              <a:spcAft>
+                <a:spcPts val="0"/>
+              </a:spcAft>
+              <a:buNone/>
+            </a:pPr>
+            <a:r>
+              <a:rPr lang="en-US" sz="8939" b="0" i="0" u="none" strike="noStrike" cap="none">
+                <a:solidFill>
+                  <a:srgbClr val="FFFFFF"/>
+                </a:solidFill>
+                <a:latin typeface="Contrail One"/>
+                <a:ea typeface="Contrail One"/>
+                <a:cs typeface="Contrail One"/>
+                <a:sym typeface="Contrail One"/>
+              </a:rPr>
+              <a:t>Data Model and Technology Used</a:t>
+            </a:r>
+            <a:endParaRPr/>
+          </a:p>
+        </p:txBody>
+      </p:sp>
+      <p:pic>
+        <p:nvPicPr>
+          <p:cNvPr id="4" name="Picture 3">
+            <a:extLst>
+              <a:ext uri="{FF2B5EF4-FFF2-40B4-BE49-F238E27FC236}">
+                <a16:creationId xmlns:a16="http://schemas.microsoft.com/office/drawing/2014/main" id="{601EF434-1181-0A46-5D2E-F458401E6C08}"/>
+              </a:ext>
+            </a:extLst>
+          </p:cNvPr>
+          <p:cNvPicPr>
+            <a:picLocks noChangeAspect="1"/>
+          </p:cNvPicPr>
+          <p:nvPr/>
+        </p:nvPicPr>
+        <p:blipFill>
+          <a:blip r:embed="rId3"/>
+          <a:stretch>
+            <a:fillRect/>
+          </a:stretch>
+        </p:blipFill>
+        <p:spPr>
+          <a:xfrm>
+            <a:off x="5573901" y="2724864"/>
             <a:ext cx="10312809" cy="5942623"/>
           </a:xfrm>
           <a:prstGeom prst="rect">
@@ -16304,10 +16753,10 @@
       </p:pic>
       <p:pic>
         <p:nvPicPr>
-          <p:cNvPr id="6" name="Picture 5">
+          <p:cNvPr id="8" name="Picture 7">
             <a:extLst>
               <a:ext uri="{FF2B5EF4-FFF2-40B4-BE49-F238E27FC236}">
-                <a16:creationId xmlns:a16="http://schemas.microsoft.com/office/drawing/2014/main" id="{BF0BCD0B-1B1F-F7CA-4970-25FAB421784D}"/>
+                <a16:creationId xmlns:a16="http://schemas.microsoft.com/office/drawing/2014/main" id="{92D4CFF3-6D4B-C512-B7AF-705DB8BE232B}"/>
               </a:ext>
             </a:extLst>
           </p:cNvPr>
@@ -16323,36 +16772,7 @@
         </p:blipFill>
         <p:spPr>
           <a:xfrm>
-            <a:off x="10260437" y="2078059"/>
-            <a:ext cx="6406902" cy="3216612"/>
-          </a:xfrm>
-          <a:prstGeom prst="rect">
-            <a:avLst/>
-          </a:prstGeom>
-        </p:spPr>
-      </p:pic>
-      <p:pic>
-        <p:nvPicPr>
-          <p:cNvPr id="8" name="Picture 7">
-            <a:extLst>
-              <a:ext uri="{FF2B5EF4-FFF2-40B4-BE49-F238E27FC236}">
-                <a16:creationId xmlns:a16="http://schemas.microsoft.com/office/drawing/2014/main" id="{FCB615B0-6BB0-2EF9-000B-D9B55E2614AB}"/>
-              </a:ext>
-            </a:extLst>
-          </p:cNvPr>
-          <p:cNvPicPr>
-            <a:picLocks noChangeAspect="1"/>
-          </p:cNvPicPr>
-          <p:nvPr/>
-        </p:nvPicPr>
-        <p:blipFill>
-          <a:blip r:embed="rId5"/>
-          <a:srcRect/>
-          <a:stretch/>
-        </p:blipFill>
-        <p:spPr>
-          <a:xfrm>
-            <a:off x="11231752" y="5796117"/>
+            <a:off x="753318" y="6331621"/>
             <a:ext cx="4464272" cy="2335866"/>
           </a:xfrm>
           <a:prstGeom prst="rect">
@@ -16362,10 +16782,10 @@
       </p:pic>
       <p:sp>
         <p:nvSpPr>
-          <p:cNvPr id="13" name="Arrow: Down 12">
+          <p:cNvPr id="14" name="Arrow: Left 13">
             <a:extLst>
               <a:ext uri="{FF2B5EF4-FFF2-40B4-BE49-F238E27FC236}">
-                <a16:creationId xmlns:a16="http://schemas.microsoft.com/office/drawing/2014/main" id="{B80D4EA4-E9AB-6DDD-5730-B8042148403B}"/>
+                <a16:creationId xmlns:a16="http://schemas.microsoft.com/office/drawing/2014/main" id="{7949C5E8-A5A4-2613-20E2-50A123D75B38}"/>
               </a:ext>
             </a:extLst>
           </p:cNvPr>
@@ -16373,60 +16793,8 @@
           <p:nvPr/>
         </p:nvSpPr>
         <p:spPr>
-          <a:xfrm>
-            <a:off x="13463888" y="4789418"/>
-            <a:ext cx="296357" cy="880030"/>
-          </a:xfrm>
-          <a:prstGeom prst="downArrow">
-            <a:avLst/>
-          </a:prstGeom>
-          <a:solidFill>
-            <a:schemeClr val="bg1"/>
-          </a:solidFill>
-          <a:ln>
-            <a:noFill/>
-          </a:ln>
-        </p:spPr>
-        <p:style>
-          <a:lnRef idx="2">
-            <a:schemeClr val="accent1">
-              <a:shade val="15000"/>
-            </a:schemeClr>
-          </a:lnRef>
-          <a:fillRef idx="1">
-            <a:schemeClr val="accent1"/>
-          </a:fillRef>
-          <a:effectRef idx="0">
-            <a:schemeClr val="accent1"/>
-          </a:effectRef>
-          <a:fontRef idx="minor">
-            <a:schemeClr val="lt1"/>
-          </a:fontRef>
-        </p:style>
-        <p:txBody>
-          <a:bodyPr rtlCol="0" anchor="ctr"/>
-          <a:lstStyle/>
-          <a:p>
-            <a:pPr algn="ctr"/>
-            <a:endParaRPr lang="en-IN"/>
-          </a:p>
-        </p:txBody>
-      </p:sp>
-      <p:sp>
-        <p:nvSpPr>
-          <p:cNvPr id="14" name="Arrow: Left 13">
-            <a:extLst>
-              <a:ext uri="{FF2B5EF4-FFF2-40B4-BE49-F238E27FC236}">
-                <a16:creationId xmlns:a16="http://schemas.microsoft.com/office/drawing/2014/main" id="{D4D0B8F4-4AE5-91E5-8DFA-359481E3A1B3}"/>
-              </a:ext>
-            </a:extLst>
-          </p:cNvPr>
-          <p:cNvSpPr/>
-          <p:nvPr/>
-        </p:nvSpPr>
-        <p:spPr>
-          <a:xfrm>
-            <a:off x="11563429" y="7374193"/>
+          <a:xfrm rot="10800000">
+            <a:off x="4233535" y="7499554"/>
             <a:ext cx="839269" cy="309716"/>
           </a:xfrm>
           <a:prstGeom prst="leftArrow">
@@ -16467,20 +16835,20 @@
     </p:spTree>
     <p:extLst>
       <p:ext uri="{BB962C8B-B14F-4D97-AF65-F5344CB8AC3E}">
-        <p14:creationId xmlns:p14="http://schemas.microsoft.com/office/powerpoint/2010/main" val="2093057309"/>
+        <p14:creationId xmlns:p14="http://schemas.microsoft.com/office/powerpoint/2010/main" val="692025291"/>
       </p:ext>
     </p:extLst>
   </p:cSld>
   <p:clrMapOvr>
     <a:masterClrMapping/>
   </p:clrMapOvr>
-  <mc:AlternateContent xmlns:mc="http://schemas.openxmlformats.org/markup-compatibility/2006" xmlns:p14="http://schemas.microsoft.com/office/powerpoint/2010/main">
-    <mc:Choice Requires="p14">
+  <mc:AlternateContent xmlns:mc="http://schemas.openxmlformats.org/markup-compatibility/2006">
+    <mc:Choice xmlns:p14="http://schemas.microsoft.com/office/powerpoint/2010/main" Requires="p14">
       <p:transition spd="slow" p14:dur="1250">
         <p:wipe/>
       </p:transition>
     </mc:Choice>
-    <mc:Fallback xmlns="">
+    <mc:Fallback>
       <p:transition spd="slow">
         <p:wipe/>
       </p:transition>
@@ -16489,7 +16857,7 @@
 </p:sld>
 </file>
 
-<file path=ppt/slides/slide4.xml><?xml version="1.0" encoding="utf-8"?>
+<file path=ppt/slides/slide5.xml><?xml version="1.0" encoding="utf-8"?>
 <p:sld xmlns:a="http://schemas.openxmlformats.org/drawingml/2006/main" xmlns:r="http://schemas.openxmlformats.org/officeDocument/2006/relationships" xmlns:p="http://schemas.openxmlformats.org/presentationml/2006/main">
   <p:cSld>
     <p:spTree>
@@ -16634,7 +17002,7 @@
         </p:blipFill>
         <p:spPr>
           <a:xfrm>
-            <a:off x="5105693" y="3207830"/>
+            <a:off x="5105693" y="3222578"/>
             <a:ext cx="8076610" cy="6009911"/>
           </a:xfrm>
           <a:prstGeom prst="rect">
@@ -16686,7 +17054,7 @@
 </p:sld>
 </file>
 
-<file path=ppt/slides/slide5.xml><?xml version="1.0" encoding="utf-8"?>
+<file path=ppt/slides/slide6.xml><?xml version="1.0" encoding="utf-8"?>
 <p:sld xmlns:a="http://schemas.openxmlformats.org/drawingml/2006/main" xmlns:r="http://schemas.openxmlformats.org/officeDocument/2006/relationships" xmlns:p="http://schemas.openxmlformats.org/presentationml/2006/main">
   <p:cSld>
     <p:spTree>
@@ -16801,8 +17169,8 @@
         </p:blipFill>
         <p:spPr>
           <a:xfrm>
-            <a:off x="5104797" y="1785610"/>
-            <a:ext cx="8078400" cy="6715779"/>
+            <a:off x="5060298" y="1781100"/>
+            <a:ext cx="8167398" cy="6724800"/>
           </a:xfrm>
           <a:prstGeom prst="rect">
             <a:avLst/>
@@ -16858,7 +17226,7 @@
 </p:sld>
 </file>
 
-<file path=ppt/slides/slide6.xml><?xml version="1.0" encoding="utf-8"?>
+<file path=ppt/slides/slide7.xml><?xml version="1.0" encoding="utf-8"?>
 <p:sld xmlns:a="http://schemas.openxmlformats.org/drawingml/2006/main" xmlns:r="http://schemas.openxmlformats.org/officeDocument/2006/relationships" xmlns:p="http://schemas.openxmlformats.org/presentationml/2006/main">
   <p:cSld>
     <p:spTree>
@@ -16985,8 +17353,8 @@
         </p:blipFill>
         <p:spPr>
           <a:xfrm>
-            <a:off x="5104797" y="1780941"/>
-            <a:ext cx="8078400" cy="6725118"/>
+            <a:off x="5071199" y="1781100"/>
+            <a:ext cx="8145596" cy="6724800"/>
           </a:xfrm>
           <a:prstGeom prst="rect">
             <a:avLst/>
@@ -17021,178 +17389,6 @@
     <p:extLst>
       <p:ext uri="{BB962C8B-B14F-4D97-AF65-F5344CB8AC3E}">
         <p14:creationId xmlns:p14="http://schemas.microsoft.com/office/powerpoint/2010/main" val="1137877637"/>
-      </p:ext>
-    </p:extLst>
-  </p:cSld>
-  <p:clrMapOvr>
-    <a:masterClrMapping/>
-  </p:clrMapOvr>
-  <mc:AlternateContent xmlns:mc="http://schemas.openxmlformats.org/markup-compatibility/2006" xmlns:p14="http://schemas.microsoft.com/office/powerpoint/2010/main">
-    <mc:Choice Requires="p14">
-      <p:transition spd="slow" p14:dur="1250">
-        <p:wipe/>
-      </p:transition>
-    </mc:Choice>
-    <mc:Fallback xmlns="">
-      <p:transition spd="slow">
-        <p:wipe/>
-      </p:transition>
-    </mc:Fallback>
-  </mc:AlternateContent>
-</p:sld>
-</file>
-
-<file path=ppt/slides/slide7.xml><?xml version="1.0" encoding="utf-8"?>
-<p:sld xmlns:a="http://schemas.openxmlformats.org/drawingml/2006/main" xmlns:r="http://schemas.openxmlformats.org/officeDocument/2006/relationships" xmlns:p="http://schemas.openxmlformats.org/presentationml/2006/main">
-  <p:cSld>
-    <p:spTree>
-      <p:nvGrpSpPr>
-        <p:cNvPr id="1" name="Shape 484"/>
-        <p:cNvGrpSpPr/>
-        <p:nvPr/>
-      </p:nvGrpSpPr>
-      <p:grpSpPr>
-        <a:xfrm>
-          <a:off x="0" y="0"/>
-          <a:ext cx="0" cy="0"/>
-          <a:chOff x="0" y="0"/>
-          <a:chExt cx="0" cy="0"/>
-        </a:xfrm>
-      </p:grpSpPr>
-      <p:sp>
-        <p:nvSpPr>
-          <p:cNvPr id="522" name="Google Shape;522;p18"/>
-          <p:cNvSpPr txBox="1"/>
-          <p:nvPr/>
-        </p:nvSpPr>
-        <p:spPr>
-          <a:xfrm>
-            <a:off x="1028698" y="544227"/>
-            <a:ext cx="16230599" cy="1477328"/>
-          </a:xfrm>
-          <a:prstGeom prst="rect">
-            <a:avLst/>
-          </a:prstGeom>
-          <a:noFill/>
-          <a:ln>
-            <a:noFill/>
-          </a:ln>
-        </p:spPr>
-        <p:txBody>
-          <a:bodyPr spcFirstLastPara="1" wrap="square" lIns="0" tIns="0" rIns="0" bIns="0" anchor="t" anchorCtr="0">
-            <a:spAutoFit/>
-          </a:bodyPr>
-          <a:lstStyle/>
-          <a:p>
-            <a:pPr marL="0" marR="0" lvl="0" indent="0" rtl="0">
-              <a:lnSpc>
-                <a:spcPct val="150000"/>
-              </a:lnSpc>
-              <a:spcBef>
-                <a:spcPts val="0"/>
-              </a:spcBef>
-              <a:spcAft>
-                <a:spcPts val="0"/>
-              </a:spcAft>
-              <a:buNone/>
-            </a:pPr>
-            <a:r>
-              <a:rPr lang="en-US" sz="3200">
-                <a:solidFill>
-                  <a:srgbClr val="FFFFFF"/>
-                </a:solidFill>
-                <a:latin typeface="Inter"/>
-                <a:ea typeface="Inter"/>
-                <a:cs typeface="Inter"/>
-                <a:sym typeface="Inter"/>
-              </a:rPr>
-              <a:t>4)</a:t>
-            </a:r>
-            <a:r>
-              <a:rPr lang="en-US" sz="3200" b="0" i="0" u="none" strike="noStrike" cap="none">
-                <a:solidFill>
-                  <a:srgbClr val="FFFFFF"/>
-                </a:solidFill>
-                <a:latin typeface="Inter"/>
-                <a:ea typeface="Inter"/>
-                <a:cs typeface="Inter"/>
-                <a:sym typeface="Inter"/>
-              </a:rPr>
-              <a:t> List down the top 5 products with the highest average </a:t>
-            </a:r>
-            <a:r>
-              <a:rPr lang="en-US" sz="3200">
-                <a:solidFill>
-                  <a:srgbClr val="FFFFFF"/>
-                </a:solidFill>
-                <a:latin typeface="Inter"/>
-                <a:ea typeface="Inter"/>
-                <a:cs typeface="Inter"/>
-                <a:sym typeface="Inter"/>
-              </a:rPr>
-              <a:t>sales having product rating greater than 4.</a:t>
-            </a:r>
-            <a:endParaRPr sz="3200"/>
-          </a:p>
-        </p:txBody>
-      </p:sp>
-      <p:pic>
-        <p:nvPicPr>
-          <p:cNvPr id="3" name="Picture 2">
-            <a:extLst>
-              <a:ext uri="{FF2B5EF4-FFF2-40B4-BE49-F238E27FC236}">
-                <a16:creationId xmlns:a16="http://schemas.microsoft.com/office/drawing/2014/main" id="{2ED28A99-D6DA-5B22-BA8F-BB323DDBB686}"/>
-              </a:ext>
-            </a:extLst>
-          </p:cNvPr>
-          <p:cNvPicPr>
-            <a:picLocks noChangeAspect="1"/>
-          </p:cNvPicPr>
-          <p:nvPr/>
-        </p:nvPicPr>
-        <p:blipFill>
-          <a:blip r:embed="rId3"/>
-          <a:srcRect/>
-          <a:stretch/>
-        </p:blipFill>
-        <p:spPr>
-          <a:xfrm>
-            <a:off x="4380268" y="2461627"/>
-            <a:ext cx="9527458" cy="6638128"/>
-          </a:xfrm>
-          <a:prstGeom prst="rect">
-            <a:avLst/>
-          </a:prstGeom>
-          <a:ln w="127000" cap="rnd">
-            <a:solidFill>
-              <a:srgbClr val="FFFFFF"/>
-            </a:solidFill>
-          </a:ln>
-          <a:effectLst>
-            <a:outerShdw blurRad="76200" dist="95250" dir="10500000" sx="97000" sy="23000" kx="900000" algn="br" rotWithShape="0">
-              <a:srgbClr val="000000">
-                <a:alpha val="20000"/>
-              </a:srgbClr>
-            </a:outerShdw>
-          </a:effectLst>
-          <a:scene3d>
-            <a:camera prst="orthographicFront"/>
-            <a:lightRig rig="twoPt" dir="t">
-              <a:rot lat="0" lon="0" rev="7800000"/>
-            </a:lightRig>
-          </a:scene3d>
-          <a:sp3d contourW="6350">
-            <a:bevelT w="50800" h="16510"/>
-            <a:contourClr>
-              <a:srgbClr val="C0C0C0"/>
-            </a:contourClr>
-          </a:sp3d>
-        </p:spPr>
-      </p:pic>
-    </p:spTree>
-    <p:extLst>
-      <p:ext uri="{BB962C8B-B14F-4D97-AF65-F5344CB8AC3E}">
-        <p14:creationId xmlns:p14="http://schemas.microsoft.com/office/powerpoint/2010/main" val="3527565580"/>
       </p:ext>
     </p:extLst>
   </p:cSld>
@@ -17269,6 +17465,18 @@
               <a:buNone/>
             </a:pPr>
             <a:r>
+              <a:rPr lang="en-US" sz="3200">
+                <a:solidFill>
+                  <a:srgbClr val="FFFFFF"/>
+                </a:solidFill>
+                <a:latin typeface="Inter"/>
+                <a:ea typeface="Inter"/>
+                <a:cs typeface="Inter"/>
+                <a:sym typeface="Inter"/>
+              </a:rPr>
+              <a:t>4)</a:t>
+            </a:r>
+            <a:r>
               <a:rPr lang="en-US" sz="3200" b="0" i="0" u="none" strike="noStrike" cap="none">
                 <a:solidFill>
                   <a:srgbClr val="FFFFFF"/>
@@ -17278,7 +17486,7 @@
                 <a:cs typeface="Inter"/>
                 <a:sym typeface="Inter"/>
               </a:rPr>
-              <a:t>5) List down the top 10 brands with the highest </a:t>
+              <a:t> List down the top 5 products with the highest average </a:t>
             </a:r>
             <a:r>
               <a:rPr lang="en-US" sz="3200">
@@ -17290,7 +17498,7 @@
                 <a:cs typeface="Inter"/>
                 <a:sym typeface="Inter"/>
               </a:rPr>
-              <a:t>sales having flipkart assured and also show the number of sales.</a:t>
+              <a:t>sales having product rating greater than 4.</a:t>
             </a:r>
             <a:endParaRPr sz="3200"/>
           </a:p>
@@ -17317,8 +17525,8 @@
         </p:blipFill>
         <p:spPr>
           <a:xfrm>
-            <a:off x="4004184" y="2504436"/>
-            <a:ext cx="10279626" cy="6610067"/>
+            <a:off x="5070600" y="2461628"/>
+            <a:ext cx="8146800" cy="6711869"/>
           </a:xfrm>
           <a:prstGeom prst="rect">
             <a:avLst/>
@@ -17352,7 +17560,7 @@
     </p:spTree>
     <p:extLst>
       <p:ext uri="{BB962C8B-B14F-4D97-AF65-F5344CB8AC3E}">
-        <p14:creationId xmlns:p14="http://schemas.microsoft.com/office/powerpoint/2010/main" val="2488920584"/>
+        <p14:creationId xmlns:p14="http://schemas.microsoft.com/office/powerpoint/2010/main" val="3527565580"/>
       </p:ext>
     </p:extLst>
   </p:cSld>
@@ -17438,7 +17646,7 @@
                 <a:cs typeface="Inter"/>
                 <a:sym typeface="Inter"/>
               </a:rPr>
-              <a:t>6) List down the top 10 </a:t>
+              <a:t>5) List down the top 10 brands with the highest </a:t>
             </a:r>
             <a:r>
               <a:rPr lang="en-US" sz="3200">
@@ -17450,31 +17658,7 @@
                 <a:cs typeface="Inter"/>
                 <a:sym typeface="Inter"/>
               </a:rPr>
-              <a:t>categories</a:t>
-            </a:r>
-            <a:r>
-              <a:rPr lang="en-US" sz="3200" b="0" i="0" u="none" strike="noStrike" cap="none">
-                <a:solidFill>
-                  <a:srgbClr val="FFFFFF"/>
-                </a:solidFill>
-                <a:latin typeface="Inter"/>
-                <a:ea typeface="Inter"/>
-                <a:cs typeface="Inter"/>
-                <a:sym typeface="Inter"/>
-              </a:rPr>
-              <a:t> with the highest </a:t>
-            </a:r>
-            <a:r>
-              <a:rPr lang="en-US" sz="3200">
-                <a:solidFill>
-                  <a:srgbClr val="FFFFFF"/>
-                </a:solidFill>
-                <a:latin typeface="Inter"/>
-                <a:ea typeface="Inter"/>
-                <a:cs typeface="Inter"/>
-                <a:sym typeface="Inter"/>
-              </a:rPr>
-              <a:t>sales having discount greater than 60%.</a:t>
+              <a:t>sales having flipkart assured and also show the number of sales.</a:t>
             </a:r>
             <a:endParaRPr sz="3200"/>
           </a:p>
@@ -17501,8 +17685,8 @@
         </p:blipFill>
         <p:spPr>
           <a:xfrm>
-            <a:off x="4045588" y="2474939"/>
-            <a:ext cx="10196818" cy="6610067"/>
+            <a:off x="3834578" y="2504436"/>
+            <a:ext cx="10618838" cy="6610067"/>
           </a:xfrm>
           <a:prstGeom prst="rect">
             <a:avLst/>
@@ -17536,7 +17720,7 @@
     </p:spTree>
     <p:extLst>
       <p:ext uri="{BB962C8B-B14F-4D97-AF65-F5344CB8AC3E}">
-        <p14:creationId xmlns:p14="http://schemas.microsoft.com/office/powerpoint/2010/main" val="2249419983"/>
+        <p14:creationId xmlns:p14="http://schemas.microsoft.com/office/powerpoint/2010/main" val="2488920584"/>
       </p:ext>
     </p:extLst>
   </p:cSld>
